--- a/Find_func/LucusEdge_자료(0518).pptx
+++ b/Find_func/LucusEdge_자료(0518).pptx
@@ -269,7 +269,7 @@
           <a:p>
             <a:fld id="{C17D52EF-3285-40B2-82EB-1336C8437030}" type="datetimeFigureOut">
               <a:rPr lang="ko-KR" altLang="en-US" smtClean="0"/>
-              <a:t>2026-05-21</a:t>
+              <a:t>2026-05-22</a:t>
             </a:fld>
             <a:endParaRPr lang="ko-KR" altLang="en-US"/>
           </a:p>
@@ -467,7 +467,7 @@
           <a:p>
             <a:fld id="{C17D52EF-3285-40B2-82EB-1336C8437030}" type="datetimeFigureOut">
               <a:rPr lang="ko-KR" altLang="en-US" smtClean="0"/>
-              <a:t>2026-05-21</a:t>
+              <a:t>2026-05-22</a:t>
             </a:fld>
             <a:endParaRPr lang="ko-KR" altLang="en-US"/>
           </a:p>
@@ -675,7 +675,7 @@
           <a:p>
             <a:fld id="{C17D52EF-3285-40B2-82EB-1336C8437030}" type="datetimeFigureOut">
               <a:rPr lang="ko-KR" altLang="en-US" smtClean="0"/>
-              <a:t>2026-05-21</a:t>
+              <a:t>2026-05-22</a:t>
             </a:fld>
             <a:endParaRPr lang="ko-KR" altLang="en-US"/>
           </a:p>
@@ -873,7 +873,7 @@
           <a:p>
             <a:fld id="{C17D52EF-3285-40B2-82EB-1336C8437030}" type="datetimeFigureOut">
               <a:rPr lang="ko-KR" altLang="en-US" smtClean="0"/>
-              <a:t>2026-05-21</a:t>
+              <a:t>2026-05-22</a:t>
             </a:fld>
             <a:endParaRPr lang="ko-KR" altLang="en-US"/>
           </a:p>
@@ -1148,7 +1148,7 @@
           <a:p>
             <a:fld id="{C17D52EF-3285-40B2-82EB-1336C8437030}" type="datetimeFigureOut">
               <a:rPr lang="ko-KR" altLang="en-US" smtClean="0"/>
-              <a:t>2026-05-21</a:t>
+              <a:t>2026-05-22</a:t>
             </a:fld>
             <a:endParaRPr lang="ko-KR" altLang="en-US"/>
           </a:p>
@@ -1413,7 +1413,7 @@
           <a:p>
             <a:fld id="{C17D52EF-3285-40B2-82EB-1336C8437030}" type="datetimeFigureOut">
               <a:rPr lang="ko-KR" altLang="en-US" smtClean="0"/>
-              <a:t>2026-05-21</a:t>
+              <a:t>2026-05-22</a:t>
             </a:fld>
             <a:endParaRPr lang="ko-KR" altLang="en-US"/>
           </a:p>
@@ -1825,7 +1825,7 @@
           <a:p>
             <a:fld id="{C17D52EF-3285-40B2-82EB-1336C8437030}" type="datetimeFigureOut">
               <a:rPr lang="ko-KR" altLang="en-US" smtClean="0"/>
-              <a:t>2026-05-21</a:t>
+              <a:t>2026-05-22</a:t>
             </a:fld>
             <a:endParaRPr lang="ko-KR" altLang="en-US"/>
           </a:p>
@@ -1966,7 +1966,7 @@
           <a:p>
             <a:fld id="{C17D52EF-3285-40B2-82EB-1336C8437030}" type="datetimeFigureOut">
               <a:rPr lang="ko-KR" altLang="en-US" smtClean="0"/>
-              <a:t>2026-05-21</a:t>
+              <a:t>2026-05-22</a:t>
             </a:fld>
             <a:endParaRPr lang="ko-KR" altLang="en-US"/>
           </a:p>
@@ -2079,7 +2079,7 @@
           <a:p>
             <a:fld id="{C17D52EF-3285-40B2-82EB-1336C8437030}" type="datetimeFigureOut">
               <a:rPr lang="ko-KR" altLang="en-US" smtClean="0"/>
-              <a:t>2026-05-21</a:t>
+              <a:t>2026-05-22</a:t>
             </a:fld>
             <a:endParaRPr lang="ko-KR" altLang="en-US"/>
           </a:p>
@@ -2390,7 +2390,7 @@
           <a:p>
             <a:fld id="{C17D52EF-3285-40B2-82EB-1336C8437030}" type="datetimeFigureOut">
               <a:rPr lang="ko-KR" altLang="en-US" smtClean="0"/>
-              <a:t>2026-05-21</a:t>
+              <a:t>2026-05-22</a:t>
             </a:fld>
             <a:endParaRPr lang="ko-KR" altLang="en-US"/>
           </a:p>
@@ -2678,7 +2678,7 @@
           <a:p>
             <a:fld id="{C17D52EF-3285-40B2-82EB-1336C8437030}" type="datetimeFigureOut">
               <a:rPr lang="ko-KR" altLang="en-US" smtClean="0"/>
-              <a:t>2026-05-21</a:t>
+              <a:t>2026-05-22</a:t>
             </a:fld>
             <a:endParaRPr lang="ko-KR" altLang="en-US"/>
           </a:p>
@@ -2919,7 +2919,7 @@
           <a:p>
             <a:fld id="{C17D52EF-3285-40B2-82EB-1336C8437030}" type="datetimeFigureOut">
               <a:rPr lang="ko-KR" altLang="en-US" smtClean="0"/>
-              <a:t>2026-05-21</a:t>
+              <a:t>2026-05-22</a:t>
             </a:fld>
             <a:endParaRPr lang="ko-KR" altLang="en-US"/>
           </a:p>
@@ -3467,7 +3467,7 @@
         </p:blipFill>
         <p:spPr>
           <a:xfrm>
-            <a:off x="693063" y="1294227"/>
+            <a:off x="479534" y="490663"/>
             <a:ext cx="4207183" cy="1769057"/>
           </a:xfrm>
           <a:prstGeom prst="rect">
@@ -3503,7 +3503,7 @@
         </p:blipFill>
         <p:spPr>
           <a:xfrm>
-            <a:off x="6322988" y="780799"/>
+            <a:off x="7948588" y="583761"/>
             <a:ext cx="3763878" cy="2648201"/>
           </a:xfrm>
           <a:prstGeom prst="rect">
@@ -3533,7 +3533,7 @@
         </p:blipFill>
         <p:spPr>
           <a:xfrm>
-            <a:off x="6299661" y="3731930"/>
+            <a:off x="7925261" y="3534892"/>
             <a:ext cx="3810532" cy="2657846"/>
           </a:xfrm>
           <a:prstGeom prst="rect">
@@ -3555,7 +3555,7 @@
         </p:nvSpPr>
         <p:spPr>
           <a:xfrm>
-            <a:off x="585537" y="963673"/>
+            <a:off x="372008" y="160109"/>
             <a:ext cx="1025236" cy="276999"/>
           </a:xfrm>
           <a:prstGeom prst="rect">
@@ -3590,7 +3590,7 @@
         </p:nvSpPr>
         <p:spPr>
           <a:xfrm>
-            <a:off x="6299661" y="503800"/>
+            <a:off x="7925261" y="306762"/>
             <a:ext cx="1025236" cy="276999"/>
           </a:xfrm>
           <a:prstGeom prst="rect">
@@ -3634,7 +3634,7 @@
         </p:nvSpPr>
         <p:spPr>
           <a:xfrm>
-            <a:off x="693063" y="3211727"/>
+            <a:off x="479534" y="2408163"/>
             <a:ext cx="2103967" cy="646331"/>
           </a:xfrm>
           <a:prstGeom prst="rect">
@@ -3665,6 +3665,36 @@
           </a:p>
         </p:txBody>
       </p:sp>
+      <p:pic>
+        <p:nvPicPr>
+          <p:cNvPr id="3" name="그림 2">
+            <a:extLst>
+              <a:ext uri="{FF2B5EF4-FFF2-40B4-BE49-F238E27FC236}">
+                <a16:creationId xmlns:a16="http://schemas.microsoft.com/office/drawing/2014/main" id="{EF959CEC-3761-F2D0-55DA-32F5E2071D4F}"/>
+              </a:ext>
+            </a:extLst>
+          </p:cNvPr>
+          <p:cNvPicPr>
+            <a:picLocks noChangeAspect="1"/>
+          </p:cNvPicPr>
+          <p:nvPr/>
+        </p:nvPicPr>
+        <p:blipFill>
+          <a:blip r:embed="rId5"/>
+          <a:stretch>
+            <a:fillRect/>
+          </a:stretch>
+        </p:blipFill>
+        <p:spPr>
+          <a:xfrm>
+            <a:off x="372008" y="3315756"/>
+            <a:ext cx="7090592" cy="2926628"/>
+          </a:xfrm>
+          <a:prstGeom prst="rect">
+            <a:avLst/>
+          </a:prstGeom>
+        </p:spPr>
+      </p:pic>
     </p:spTree>
     <p:extLst>
       <p:ext uri="{BB962C8B-B14F-4D97-AF65-F5344CB8AC3E}">
@@ -3786,7 +3816,7 @@
         </p:nvSpPr>
         <p:spPr>
           <a:xfrm>
-            <a:off x="6628741" y="236067"/>
+            <a:off x="8132076" y="273013"/>
             <a:ext cx="1025236" cy="276999"/>
           </a:xfrm>
           <a:prstGeom prst="rect">
@@ -3830,7 +3860,7 @@
         </p:nvSpPr>
         <p:spPr>
           <a:xfrm>
-            <a:off x="291098" y="3814717"/>
+            <a:off x="318807" y="3042722"/>
             <a:ext cx="4774895" cy="646331"/>
           </a:xfrm>
           <a:prstGeom prst="rect">
@@ -3883,7 +3913,7 @@
         </p:blipFill>
         <p:spPr>
           <a:xfrm>
-            <a:off x="291098" y="1171462"/>
+            <a:off x="318807" y="946817"/>
             <a:ext cx="5463959" cy="1984317"/>
           </a:xfrm>
           <a:prstGeom prst="rect">
@@ -3893,10 +3923,10 @@
       </p:pic>
       <p:pic>
         <p:nvPicPr>
-          <p:cNvPr id="7" name="그림 6">
-            <a:extLst>
-              <a:ext uri="{FF2B5EF4-FFF2-40B4-BE49-F238E27FC236}">
-                <a16:creationId xmlns:a16="http://schemas.microsoft.com/office/drawing/2014/main" id="{2BDAE864-D8CE-775B-3C6A-9D0FCD230DA4}"/>
+          <p:cNvPr id="12" name="그림 11">
+            <a:extLst>
+              <a:ext uri="{FF2B5EF4-FFF2-40B4-BE49-F238E27FC236}">
+                <a16:creationId xmlns:a16="http://schemas.microsoft.com/office/drawing/2014/main" id="{B4250983-4BCD-11D3-4A95-CF6CBFBB0D7F}"/>
               </a:ext>
             </a:extLst>
           </p:cNvPr>
@@ -3906,43 +3936,27 @@
           <p:nvPr/>
         </p:nvPicPr>
         <p:blipFill>
-          <a:blip r:embed="rId3">
-            <a:extLst>
-              <a:ext uri="{28A0092B-C50C-407E-A947-70E740481C1C}">
-                <a14:useLocalDpi xmlns:a14="http://schemas.microsoft.com/office/drawing/2010/main" val="0"/>
-              </a:ext>
-            </a:extLst>
-          </a:blip>
+          <a:blip r:embed="rId3"/>
           <a:stretch>
             <a:fillRect/>
           </a:stretch>
         </p:blipFill>
         <p:spPr>
           <a:xfrm>
-            <a:off x="6628741" y="729670"/>
-            <a:ext cx="2746083" cy="2308951"/>
+            <a:off x="8132076" y="3292171"/>
+            <a:ext cx="3886742" cy="3267531"/>
           </a:xfrm>
           <a:prstGeom prst="rect">
             <a:avLst/>
           </a:prstGeom>
-          <a:ln>
-            <a:noFill/>
-          </a:ln>
-          <a:effectLst>
-            <a:outerShdw blurRad="292100" dist="139700" dir="2700000" algn="tl" rotWithShape="0">
-              <a:srgbClr val="333333">
-                <a:alpha val="65000"/>
-              </a:srgbClr>
-            </a:outerShdw>
-          </a:effectLst>
         </p:spPr>
       </p:pic>
       <p:pic>
         <p:nvPicPr>
-          <p:cNvPr id="12" name="그림 11">
-            <a:extLst>
-              <a:ext uri="{FF2B5EF4-FFF2-40B4-BE49-F238E27FC236}">
-                <a16:creationId xmlns:a16="http://schemas.microsoft.com/office/drawing/2014/main" id="{B4250983-4BCD-11D3-4A95-CF6CBFBB0D7F}"/>
+          <p:cNvPr id="4" name="그림 3">
+            <a:extLst>
+              <a:ext uri="{FF2B5EF4-FFF2-40B4-BE49-F238E27FC236}">
+                <a16:creationId xmlns:a16="http://schemas.microsoft.com/office/drawing/2014/main" id="{5A4C5875-3F1B-A014-9ADB-E3616124A9B1}"/>
               </a:ext>
             </a:extLst>
           </p:cNvPr>
@@ -3959,12 +3973,77 @@
         </p:blipFill>
         <p:spPr>
           <a:xfrm>
-            <a:off x="6628741" y="3255225"/>
-            <a:ext cx="3886742" cy="3267531"/>
+            <a:off x="392003" y="3689053"/>
+            <a:ext cx="6923197" cy="2893384"/>
           </a:xfrm>
           <a:prstGeom prst="rect">
             <a:avLst/>
           </a:prstGeom>
+        </p:spPr>
+      </p:pic>
+      <p:pic>
+        <p:nvPicPr>
+          <p:cNvPr id="2" name="그림 1">
+            <a:extLst>
+              <a:ext uri="{FF2B5EF4-FFF2-40B4-BE49-F238E27FC236}">
+                <a16:creationId xmlns:a16="http://schemas.microsoft.com/office/drawing/2014/main" id="{B9A46696-82AE-8A2B-08FE-50FB09A7DA01}"/>
+              </a:ext>
+            </a:extLst>
+          </p:cNvPr>
+          <p:cNvPicPr>
+            <a:picLocks noChangeAspect="1"/>
+          </p:cNvPicPr>
+          <p:nvPr/>
+        </p:nvPicPr>
+        <p:blipFill>
+          <a:blip r:embed="rId5">
+            <a:extLst>
+              <a:ext uri="{28A0092B-C50C-407E-A947-70E740481C1C}">
+                <a14:useLocalDpi xmlns:a14="http://schemas.microsoft.com/office/drawing/2010/main" val="0"/>
+              </a:ext>
+            </a:extLst>
+          </a:blip>
+          <a:srcRect/>
+          <a:stretch/>
+        </p:blipFill>
+        <p:spPr>
+          <a:xfrm>
+            <a:off x="8206989" y="669818"/>
+            <a:ext cx="2359988" cy="1984317"/>
+          </a:xfrm>
+          <a:prstGeom prst="rect">
+            <a:avLst/>
+          </a:prstGeom>
+          <a:solidFill>
+            <a:srgbClr val="FFFFFF">
+              <a:shade val="85000"/>
+            </a:srgbClr>
+          </a:solidFill>
+          <a:ln w="88900" cap="sq">
+            <a:solidFill>
+              <a:srgbClr val="FFFFFF"/>
+            </a:solidFill>
+            <a:miter lim="800000"/>
+          </a:ln>
+          <a:effectLst>
+            <a:outerShdw blurRad="55000" dist="18000" dir="5400000" algn="tl" rotWithShape="0">
+              <a:srgbClr val="000000">
+                <a:alpha val="40000"/>
+              </a:srgbClr>
+            </a:outerShdw>
+          </a:effectLst>
+          <a:scene3d>
+            <a:camera prst="orthographicFront"/>
+            <a:lightRig rig="twoPt" dir="t">
+              <a:rot lat="0" lon="0" rev="7200000"/>
+            </a:lightRig>
+          </a:scene3d>
+          <a:sp3d>
+            <a:bevelT w="25400" h="19050"/>
+            <a:contourClr>
+              <a:srgbClr val="FFFFFF"/>
+            </a:contourClr>
+          </a:sp3d>
         </p:spPr>
       </p:pic>
     </p:spTree>
@@ -4909,53 +4988,12 @@
           <a:chExt cx="0" cy="0"/>
         </a:xfrm>
       </p:grpSpPr>
-      <p:sp>
-        <p:nvSpPr>
-          <p:cNvPr id="2" name="제목 1">
-            <a:extLst>
-              <a:ext uri="{FF2B5EF4-FFF2-40B4-BE49-F238E27FC236}">
-                <a16:creationId xmlns:a16="http://schemas.microsoft.com/office/drawing/2014/main" id="{985DAD51-8EAC-21F1-9398-DE08B93C6B94}"/>
-              </a:ext>
-            </a:extLst>
-          </p:cNvPr>
-          <p:cNvSpPr>
-            <a:spLocks noGrp="1"/>
-          </p:cNvSpPr>
-          <p:nvPr>
-            <p:ph type="title"/>
-          </p:nvPr>
-        </p:nvSpPr>
-        <p:spPr/>
-        <p:txBody>
-          <a:bodyPr/>
-          <a:lstStyle/>
-          <a:p>
-            <a:r>
-              <a:rPr lang="ko-KR" altLang="en-US" dirty="0" err="1"/>
-              <a:t>필터랑</a:t>
-            </a:r>
-            <a:r>
-              <a:rPr lang="ko-KR" altLang="en-US" dirty="0"/>
-              <a:t> </a:t>
-            </a:r>
-            <a:r>
-              <a:rPr lang="ko-KR" altLang="en-US" dirty="0" err="1"/>
-              <a:t>그레이스케일</a:t>
-            </a:r>
-            <a:r>
-              <a:rPr lang="ko-KR" altLang="en-US"/>
-              <a:t> 순서 바꾸기</a:t>
-            </a:r>
-            <a:endParaRPr lang="ko-KR" altLang="en-US" dirty="0"/>
-          </a:p>
-        </p:txBody>
-      </p:sp>
       <p:pic>
         <p:nvPicPr>
-          <p:cNvPr id="4" name="그림 3">
-            <a:extLst>
-              <a:ext uri="{FF2B5EF4-FFF2-40B4-BE49-F238E27FC236}">
-                <a16:creationId xmlns:a16="http://schemas.microsoft.com/office/drawing/2014/main" id="{83D07AB8-5441-B9B1-8361-49F3A164DEDA}"/>
+          <p:cNvPr id="5" name="그림 4">
+            <a:extLst>
+              <a:ext uri="{FF2B5EF4-FFF2-40B4-BE49-F238E27FC236}">
+                <a16:creationId xmlns:a16="http://schemas.microsoft.com/office/drawing/2014/main" id="{CC3DC8B2-F6AB-BCF4-C818-0DC7F38F5B59}"/>
               </a:ext>
             </a:extLst>
           </p:cNvPr>
@@ -4972,8 +5010,8 @@
         </p:blipFill>
         <p:spPr>
           <a:xfrm>
-            <a:off x="602017" y="1819833"/>
-            <a:ext cx="10987965" cy="4673042"/>
+            <a:off x="0" y="876519"/>
+            <a:ext cx="12192000" cy="5104962"/>
           </a:xfrm>
           <a:prstGeom prst="rect">
             <a:avLst/>
